--- a/Plots/Fig_2/Fig_2_compiled.pptx
+++ b/Plots/Fig_2/Fig_2_compiled.pptx
@@ -118,7 +118,7 @@
 <file path=ppt/revisionInfo.xml><?xml version="1.0" encoding="utf-8"?>
 <p1510:revInfo xmlns:a="http://schemas.openxmlformats.org/drawingml/2006/main" xmlns:r="http://schemas.openxmlformats.org/officeDocument/2006/relationships" xmlns:p1510="http://schemas.microsoft.com/office/powerpoint/2015/10/main">
   <p1510:revLst>
-    <p1510:client id="{23535A9E-6703-4D36-878D-CE327F54E7AF}" v="19" dt="2026-03-17T21:04:32.849"/>
+    <p1510:client id="{BB1D7DDE-C668-43A0-9611-F20A2F40C3CB}" v="5" dt="2026-04-01T20:38:14.796"/>
   </p1510:revLst>
 </p1510:revInfo>
 </file>
@@ -128,55 +128,16 @@
   <pc:docChgLst>
     <pc:chgData name="Kate Parker" userId="2917054de0bc48a0" providerId="LiveId" clId="{F1CEFB28-C78A-4591-A5A8-1345B4514FFC}"/>
     <pc:docChg chg="undo redo custSel addSld delSld modSld">
-      <pc:chgData name="Kate Parker" userId="2917054de0bc48a0" providerId="LiveId" clId="{F1CEFB28-C78A-4591-A5A8-1345B4514FFC}" dt="2026-03-17T21:15:40.610" v="271" actId="1076"/>
+      <pc:chgData name="Kate Parker" userId="2917054de0bc48a0" providerId="LiveId" clId="{F1CEFB28-C78A-4591-A5A8-1345B4514FFC}" dt="2026-04-01T20:40:15.044" v="362" actId="1076"/>
       <pc:docMkLst>
         <pc:docMk/>
       </pc:docMkLst>
-      <pc:sldChg chg="addSp delSp modSp del mod">
-        <pc:chgData name="Kate Parker" userId="2917054de0bc48a0" providerId="LiveId" clId="{F1CEFB28-C78A-4591-A5A8-1345B4514FFC}" dt="2026-03-17T15:28:53.078" v="137" actId="2696"/>
-        <pc:sldMkLst>
-          <pc:docMk/>
-          <pc:sldMk cId="1301716188" sldId="256"/>
-        </pc:sldMkLst>
-        <pc:grpChg chg="mod">
-          <ac:chgData name="Kate Parker" userId="2917054de0bc48a0" providerId="LiveId" clId="{F1CEFB28-C78A-4591-A5A8-1345B4514FFC}" dt="2026-03-17T15:26:22.297" v="109" actId="1076"/>
-          <ac:grpSpMkLst>
-            <pc:docMk/>
-            <pc:sldMk cId="1301716188" sldId="256"/>
-            <ac:grpSpMk id="14" creationId="{FED7F5F5-13F9-3C1F-332F-546A6C70E6D3}"/>
-          </ac:grpSpMkLst>
-        </pc:grpChg>
-        <pc:picChg chg="add mod ord modCrop">
-          <ac:chgData name="Kate Parker" userId="2917054de0bc48a0" providerId="LiveId" clId="{F1CEFB28-C78A-4591-A5A8-1345B4514FFC}" dt="2026-03-16T18:13:04.380" v="104" actId="1076"/>
-          <ac:picMkLst>
-            <pc:docMk/>
-            <pc:sldMk cId="1301716188" sldId="256"/>
-            <ac:picMk id="9" creationId="{56451852-97F1-EAFF-0F96-CF79C4F324FD}"/>
-          </ac:picMkLst>
-        </pc:picChg>
-      </pc:sldChg>
       <pc:sldChg chg="addSp delSp modSp new mod modNotesTx">
-        <pc:chgData name="Kate Parker" userId="2917054de0bc48a0" providerId="LiveId" clId="{F1CEFB28-C78A-4591-A5A8-1345B4514FFC}" dt="2026-03-17T21:15:40.610" v="271" actId="1076"/>
+        <pc:chgData name="Kate Parker" userId="2917054de0bc48a0" providerId="LiveId" clId="{F1CEFB28-C78A-4591-A5A8-1345B4514FFC}" dt="2026-04-01T20:40:15.044" v="362" actId="1076"/>
         <pc:sldMkLst>
           <pc:docMk/>
           <pc:sldMk cId="2400408542" sldId="257"/>
         </pc:sldMkLst>
-        <pc:spChg chg="del">
-          <ac:chgData name="Kate Parker" userId="2917054de0bc48a0" providerId="LiveId" clId="{F1CEFB28-C78A-4591-A5A8-1345B4514FFC}" dt="2026-03-16T18:13:16.426" v="107" actId="478"/>
-          <ac:spMkLst>
-            <pc:docMk/>
-            <pc:sldMk cId="2400408542" sldId="257"/>
-            <ac:spMk id="2" creationId="{3AC24D60-9F2D-B2C7-F6AA-CCCE5CAAC9D4}"/>
-          </ac:spMkLst>
-        </pc:spChg>
-        <pc:spChg chg="del">
-          <ac:chgData name="Kate Parker" userId="2917054de0bc48a0" providerId="LiveId" clId="{F1CEFB28-C78A-4591-A5A8-1345B4514FFC}" dt="2026-03-16T18:13:15.371" v="106" actId="478"/>
-          <ac:spMkLst>
-            <pc:docMk/>
-            <pc:sldMk cId="2400408542" sldId="257"/>
-            <ac:spMk id="3" creationId="{AD14E657-09AE-24A3-747A-EA23B331961F}"/>
-          </ac:spMkLst>
-        </pc:spChg>
         <pc:spChg chg="add mod topLvl">
           <ac:chgData name="Kate Parker" userId="2917054de0bc48a0" providerId="LiveId" clId="{F1CEFB28-C78A-4591-A5A8-1345B4514FFC}" dt="2026-03-17T15:37:48.649" v="167" actId="165"/>
           <ac:spMkLst>
@@ -185,116 +146,156 @@
             <ac:spMk id="4" creationId="{810E7315-DB54-CBDD-760C-64FDB704189B}"/>
           </ac:spMkLst>
         </pc:spChg>
-        <pc:spChg chg="add mod topLvl">
-          <ac:chgData name="Kate Parker" userId="2917054de0bc48a0" providerId="LiveId" clId="{F1CEFB28-C78A-4591-A5A8-1345B4514FFC}" dt="2026-03-17T15:37:48.649" v="167" actId="165"/>
+        <pc:spChg chg="add mod">
+          <ac:chgData name="Kate Parker" userId="2917054de0bc48a0" providerId="LiveId" clId="{F1CEFB28-C78A-4591-A5A8-1345B4514FFC}" dt="2026-04-01T20:38:14.796" v="346" actId="164"/>
+          <ac:spMkLst>
+            <pc:docMk/>
+            <pc:sldMk cId="2400408542" sldId="257"/>
+            <ac:spMk id="6" creationId="{3F0720A4-329A-4F01-563A-2E6C943A8338}"/>
+          </ac:spMkLst>
+        </pc:spChg>
+        <pc:spChg chg="add mod">
+          <ac:chgData name="Kate Parker" userId="2917054de0bc48a0" providerId="LiveId" clId="{F1CEFB28-C78A-4591-A5A8-1345B4514FFC}" dt="2026-04-01T20:38:14.796" v="346" actId="164"/>
+          <ac:spMkLst>
+            <pc:docMk/>
+            <pc:sldMk cId="2400408542" sldId="257"/>
+            <ac:spMk id="7" creationId="{23E00BFB-0F64-3529-98B7-ABC1177A9A6B}"/>
+          </ac:spMkLst>
+        </pc:spChg>
+        <pc:spChg chg="add del mod topLvl">
+          <ac:chgData name="Kate Parker" userId="2917054de0bc48a0" providerId="LiveId" clId="{F1CEFB28-C78A-4591-A5A8-1345B4514FFC}" dt="2026-04-01T20:39:07.520" v="359" actId="478"/>
           <ac:spMkLst>
             <pc:docMk/>
             <pc:sldMk cId="2400408542" sldId="257"/>
             <ac:spMk id="10" creationId="{C1C5C9AE-FFD3-5641-F247-0C2DA922FD21}"/>
           </ac:spMkLst>
         </pc:spChg>
-        <pc:spChg chg="add mod topLvl">
-          <ac:chgData name="Kate Parker" userId="2917054de0bc48a0" providerId="LiveId" clId="{F1CEFB28-C78A-4591-A5A8-1345B4514FFC}" dt="2026-03-17T15:37:48.649" v="167" actId="165"/>
+        <pc:spChg chg="add del mod topLvl">
+          <ac:chgData name="Kate Parker" userId="2917054de0bc48a0" providerId="LiveId" clId="{F1CEFB28-C78A-4591-A5A8-1345B4514FFC}" dt="2026-04-01T20:38:54.222" v="355" actId="478"/>
           <ac:spMkLst>
             <pc:docMk/>
             <pc:sldMk cId="2400408542" sldId="257"/>
             <ac:spMk id="11" creationId="{91C46049-EA2C-2FD2-DAC6-1300000BE860}"/>
           </ac:spMkLst>
         </pc:spChg>
-        <pc:spChg chg="add mod topLvl">
-          <ac:chgData name="Kate Parker" userId="2917054de0bc48a0" providerId="LiveId" clId="{F1CEFB28-C78A-4591-A5A8-1345B4514FFC}" dt="2026-03-17T15:37:48.649" v="167" actId="165"/>
+        <pc:spChg chg="add del mod topLvl">
+          <ac:chgData name="Kate Parker" userId="2917054de0bc48a0" providerId="LiveId" clId="{F1CEFB28-C78A-4591-A5A8-1345B4514FFC}" dt="2026-04-01T20:38:43.108" v="352" actId="478"/>
           <ac:spMkLst>
             <pc:docMk/>
             <pc:sldMk cId="2400408542" sldId="257"/>
             <ac:spMk id="12" creationId="{F5B67999-4C99-372A-90A3-FACF9EC02339}"/>
           </ac:spMkLst>
         </pc:spChg>
-        <pc:spChg chg="add mod topLvl">
-          <ac:chgData name="Kate Parker" userId="2917054de0bc48a0" providerId="LiveId" clId="{F1CEFB28-C78A-4591-A5A8-1345B4514FFC}" dt="2026-03-17T15:38:44.417" v="179" actId="403"/>
+        <pc:spChg chg="add del mod ord topLvl">
+          <ac:chgData name="Kate Parker" userId="2917054de0bc48a0" providerId="LiveId" clId="{F1CEFB28-C78A-4591-A5A8-1345B4514FFC}" dt="2026-04-01T20:38:58.964" v="357" actId="478"/>
           <ac:spMkLst>
             <pc:docMk/>
             <pc:sldMk cId="2400408542" sldId="257"/>
             <ac:spMk id="13" creationId="{F375EC5E-1547-F215-B182-C1ED9D355CF9}"/>
           </ac:spMkLst>
         </pc:spChg>
-        <pc:spChg chg="add mod topLvl">
-          <ac:chgData name="Kate Parker" userId="2917054de0bc48a0" providerId="LiveId" clId="{F1CEFB28-C78A-4591-A5A8-1345B4514FFC}" dt="2026-03-17T15:38:51.159" v="181" actId="403"/>
+        <pc:spChg chg="add del mod ord topLvl">
+          <ac:chgData name="Kate Parker" userId="2917054de0bc48a0" providerId="LiveId" clId="{F1CEFB28-C78A-4591-A5A8-1345B4514FFC}" dt="2026-04-01T20:38:49.120" v="354" actId="478"/>
           <ac:spMkLst>
             <pc:docMk/>
             <pc:sldMk cId="2400408542" sldId="257"/>
             <ac:spMk id="14" creationId="{3EE36DEA-E1AE-C0FA-BD06-CD9BAC32E4FD}"/>
           </ac:spMkLst>
         </pc:spChg>
-        <pc:spChg chg="add mod topLvl">
-          <ac:chgData name="Kate Parker" userId="2917054de0bc48a0" providerId="LiveId" clId="{F1CEFB28-C78A-4591-A5A8-1345B4514FFC}" dt="2026-03-17T15:38:54.318" v="183" actId="403"/>
+        <pc:spChg chg="add del mod ord topLvl">
+          <ac:chgData name="Kate Parker" userId="2917054de0bc48a0" providerId="LiveId" clId="{F1CEFB28-C78A-4591-A5A8-1345B4514FFC}" dt="2026-04-01T20:38:36.098" v="350" actId="478"/>
           <ac:spMkLst>
             <pc:docMk/>
             <pc:sldMk cId="2400408542" sldId="257"/>
             <ac:spMk id="15" creationId="{E397CA28-9B72-495E-F230-AC6628AB4C86}"/>
           </ac:spMkLst>
         </pc:spChg>
-        <pc:spChg chg="add mod">
-          <ac:chgData name="Kate Parker" userId="2917054de0bc48a0" providerId="LiveId" clId="{F1CEFB28-C78A-4591-A5A8-1345B4514FFC}" dt="2026-03-17T21:15:23.684" v="266" actId="1076"/>
+        <pc:spChg chg="add del mod ord">
+          <ac:chgData name="Kate Parker" userId="2917054de0bc48a0" providerId="LiveId" clId="{F1CEFB28-C78A-4591-A5A8-1345B4514FFC}" dt="2026-04-01T20:39:02.867" v="358" actId="478"/>
           <ac:spMkLst>
             <pc:docMk/>
             <pc:sldMk cId="2400408542" sldId="257"/>
             <ac:spMk id="18" creationId="{E3036C35-3A7F-F8C4-4BFC-03661151B1DC}"/>
           </ac:spMkLst>
         </pc:spChg>
-        <pc:spChg chg="add mod">
-          <ac:chgData name="Kate Parker" userId="2917054de0bc48a0" providerId="LiveId" clId="{F1CEFB28-C78A-4591-A5A8-1345B4514FFC}" dt="2026-03-17T21:15:23.684" v="266" actId="1076"/>
+        <pc:spChg chg="add del mod ord">
+          <ac:chgData name="Kate Parker" userId="2917054de0bc48a0" providerId="LiveId" clId="{F1CEFB28-C78A-4591-A5A8-1345B4514FFC}" dt="2026-04-01T20:38:45.511" v="353" actId="478"/>
           <ac:spMkLst>
             <pc:docMk/>
             <pc:sldMk cId="2400408542" sldId="257"/>
             <ac:spMk id="19" creationId="{012F7560-0511-6508-2DB9-BFA644B5B1A3}"/>
           </ac:spMkLst>
         </pc:spChg>
-        <pc:spChg chg="add mod">
-          <ac:chgData name="Kate Parker" userId="2917054de0bc48a0" providerId="LiveId" clId="{F1CEFB28-C78A-4591-A5A8-1345B4514FFC}" dt="2026-03-17T21:15:23.684" v="266" actId="1076"/>
+        <pc:spChg chg="add del mod ord">
+          <ac:chgData name="Kate Parker" userId="2917054de0bc48a0" providerId="LiveId" clId="{F1CEFB28-C78A-4591-A5A8-1345B4514FFC}" dt="2026-04-01T20:38:38.581" v="351" actId="478"/>
           <ac:spMkLst>
             <pc:docMk/>
             <pc:sldMk cId="2400408542" sldId="257"/>
             <ac:spMk id="20" creationId="{D6E61D77-4DE1-0A12-83FC-FA9A540EC19D}"/>
           </ac:spMkLst>
         </pc:spChg>
-        <pc:grpChg chg="del mod">
-          <ac:chgData name="Kate Parker" userId="2917054de0bc48a0" providerId="LiveId" clId="{F1CEFB28-C78A-4591-A5A8-1345B4514FFC}" dt="2026-03-17T15:27:13.818" v="117" actId="478"/>
-          <ac:grpSpMkLst>
+        <pc:spChg chg="add mod">
+          <ac:chgData name="Kate Parker" userId="2917054de0bc48a0" providerId="LiveId" clId="{F1CEFB28-C78A-4591-A5A8-1345B4514FFC}" dt="2026-04-01T20:38:14.796" v="346" actId="164"/>
+          <ac:spMkLst>
             <pc:docMk/>
             <pc:sldMk cId="2400408542" sldId="257"/>
-            <ac:grpSpMk id="5" creationId="{BA98DED8-76C1-4247-E0F5-04578E7CB8E2}"/>
-          </ac:grpSpMkLst>
-        </pc:grpChg>
+            <ac:spMk id="21" creationId="{4B89920E-670D-38B5-4091-CBA4DD6754E5}"/>
+          </ac:spMkLst>
+        </pc:spChg>
+        <pc:spChg chg="add mod">
+          <ac:chgData name="Kate Parker" userId="2917054de0bc48a0" providerId="LiveId" clId="{F1CEFB28-C78A-4591-A5A8-1345B4514FFC}" dt="2026-04-01T20:38:14.796" v="346" actId="164"/>
+          <ac:spMkLst>
+            <pc:docMk/>
+            <pc:sldMk cId="2400408542" sldId="257"/>
+            <ac:spMk id="22" creationId="{795E2ACE-9E2D-619C-0839-4E9BDE059903}"/>
+          </ac:spMkLst>
+        </pc:spChg>
+        <pc:spChg chg="add mod">
+          <ac:chgData name="Kate Parker" userId="2917054de0bc48a0" providerId="LiveId" clId="{F1CEFB28-C78A-4591-A5A8-1345B4514FFC}" dt="2026-04-01T20:38:14.796" v="346" actId="164"/>
+          <ac:spMkLst>
+            <pc:docMk/>
+            <pc:sldMk cId="2400408542" sldId="257"/>
+            <ac:spMk id="23" creationId="{48A7D015-D787-FDB1-C2A3-BBA67E63CA7F}"/>
+          </ac:spMkLst>
+        </pc:spChg>
+        <pc:spChg chg="add mod">
+          <ac:chgData name="Kate Parker" userId="2917054de0bc48a0" providerId="LiveId" clId="{F1CEFB28-C78A-4591-A5A8-1345B4514FFC}" dt="2026-04-01T20:38:14.796" v="346" actId="164"/>
+          <ac:spMkLst>
+            <pc:docMk/>
+            <pc:sldMk cId="2400408542" sldId="257"/>
+            <ac:spMk id="24" creationId="{84FA8B9F-C33B-0C96-F932-4BD1EF6C70B0}"/>
+          </ac:spMkLst>
+        </pc:spChg>
         <pc:grpChg chg="mod ord">
-          <ac:chgData name="Kate Parker" userId="2917054de0bc48a0" providerId="LiveId" clId="{F1CEFB28-C78A-4591-A5A8-1345B4514FFC}" dt="2026-03-17T21:14:44.609" v="258" actId="1076"/>
+          <ac:chgData name="Kate Parker" userId="2917054de0bc48a0" providerId="LiveId" clId="{F1CEFB28-C78A-4591-A5A8-1345B4514FFC}" dt="2026-04-01T20:35:05.612" v="307" actId="166"/>
           <ac:grpSpMkLst>
             <pc:docMk/>
             <pc:sldMk cId="2400408542" sldId="257"/>
             <ac:grpSpMk id="16" creationId="{7CA8D7DB-E482-756D-3BD9-F3A5A5D8EAD8}"/>
           </ac:grpSpMkLst>
         </pc:grpChg>
-        <pc:picChg chg="add del mod ord modCrop">
-          <ac:chgData name="Kate Parker" userId="2917054de0bc48a0" providerId="LiveId" clId="{F1CEFB28-C78A-4591-A5A8-1345B4514FFC}" dt="2026-03-17T20:58:12.247" v="198" actId="478"/>
+        <pc:grpChg chg="add mod">
+          <ac:chgData name="Kate Parker" userId="2917054de0bc48a0" providerId="LiveId" clId="{F1CEFB28-C78A-4591-A5A8-1345B4514FFC}" dt="2026-04-01T20:40:15.044" v="362" actId="1076"/>
+          <ac:grpSpMkLst>
+            <pc:docMk/>
+            <pc:sldMk cId="2400408542" sldId="257"/>
+            <ac:grpSpMk id="25" creationId="{BC03010F-A6BE-168A-A5AB-84981EA1E127}"/>
+          </ac:grpSpMkLst>
+        </pc:grpChg>
+        <pc:picChg chg="add mod ord modCrop">
+          <ac:chgData name="Kate Parker" userId="2917054de0bc48a0" providerId="LiveId" clId="{F1CEFB28-C78A-4591-A5A8-1345B4514FFC}" dt="2026-04-01T20:39:27.542" v="360" actId="1076"/>
           <ac:picMkLst>
             <pc:docMk/>
             <pc:sldMk cId="2400408542" sldId="257"/>
-            <ac:picMk id="3" creationId="{AF265014-51F9-E732-FA37-F6BF2BE3C89F}"/>
+            <ac:picMk id="3" creationId="{388684CE-ED13-C6B5-E4CC-4C08DF2BDA27}"/>
           </ac:picMkLst>
         </pc:picChg>
-        <pc:picChg chg="add del mod ord topLvl">
-          <ac:chgData name="Kate Parker" userId="2917054de0bc48a0" providerId="LiveId" clId="{F1CEFB28-C78A-4591-A5A8-1345B4514FFC}" dt="2026-03-17T20:59:07.992" v="207" actId="478"/>
+        <pc:picChg chg="add del mod">
+          <ac:chgData name="Kate Parker" userId="2917054de0bc48a0" providerId="LiveId" clId="{F1CEFB28-C78A-4591-A5A8-1345B4514FFC}" dt="2026-04-01T20:37:22.132" v="338" actId="478"/>
           <ac:picMkLst>
             <pc:docMk/>
             <pc:sldMk cId="2400408542" sldId="257"/>
-            <ac:picMk id="6" creationId="{A7A7CFDD-A157-FD37-5C23-2AF9023D3FC2}"/>
-          </ac:picMkLst>
-        </pc:picChg>
-        <pc:picChg chg="del mod">
-          <ac:chgData name="Kate Parker" userId="2917054de0bc48a0" providerId="LiveId" clId="{F1CEFB28-C78A-4591-A5A8-1345B4514FFC}" dt="2026-03-17T15:27:13.818" v="117" actId="478"/>
-          <ac:picMkLst>
-            <pc:docMk/>
-            <pc:sldMk cId="2400408542" sldId="257"/>
-            <ac:picMk id="7" creationId="{7F815377-4883-4C5F-9B99-02E31EA8D82B}"/>
+            <ac:picMk id="5" creationId="{B6A0F87E-24FD-1991-6F10-104CD51B8BF7}"/>
           </ac:picMkLst>
         </pc:picChg>
         <pc:picChg chg="add mod topLvl modCrop">
@@ -305,52 +306,20 @@
             <ac:picMk id="8" creationId="{99DF7381-EDAB-1979-2542-15622F1DE051}"/>
           </ac:picMkLst>
         </pc:picChg>
-        <pc:picChg chg="mod topLvl">
-          <ac:chgData name="Kate Parker" userId="2917054de0bc48a0" providerId="LiveId" clId="{F1CEFB28-C78A-4591-A5A8-1345B4514FFC}" dt="2026-03-17T21:15:24.210" v="267" actId="1076"/>
+        <pc:picChg chg="add del mod topLvl">
+          <ac:chgData name="Kate Parker" userId="2917054de0bc48a0" providerId="LiveId" clId="{F1CEFB28-C78A-4591-A5A8-1345B4514FFC}" dt="2026-04-01T20:35:37.750" v="321" actId="478"/>
           <ac:picMkLst>
             <pc:docMk/>
             <pc:sldMk cId="2400408542" sldId="257"/>
             <ac:picMk id="9" creationId="{E258AB5D-EE42-792F-EFCE-BD00171B7E55}"/>
           </ac:picMkLst>
         </pc:picChg>
-        <pc:picChg chg="add mod modCrop">
-          <ac:chgData name="Kate Parker" userId="2917054de0bc48a0" providerId="LiveId" clId="{F1CEFB28-C78A-4591-A5A8-1345B4514FFC}" dt="2026-03-17T15:37:36.097" v="163" actId="1076"/>
+        <pc:picChg chg="add mod ord modCrop">
+          <ac:chgData name="Kate Parker" userId="2917054de0bc48a0" providerId="LiveId" clId="{F1CEFB28-C78A-4591-A5A8-1345B4514FFC}" dt="2026-04-01T20:35:57.724" v="324" actId="166"/>
           <ac:picMkLst>
             <pc:docMk/>
             <pc:sldMk cId="2400408542" sldId="257"/>
             <ac:picMk id="17" creationId="{6EE77F7E-5E31-6005-019F-31F7DE51F658}"/>
-          </ac:picMkLst>
-        </pc:picChg>
-        <pc:picChg chg="add del mod">
-          <ac:chgData name="Kate Parker" userId="2917054de0bc48a0" providerId="LiveId" clId="{F1CEFB28-C78A-4591-A5A8-1345B4514FFC}" dt="2026-03-17T20:31:51.508" v="189" actId="478"/>
-          <ac:picMkLst>
-            <pc:docMk/>
-            <pc:sldMk cId="2400408542" sldId="257"/>
-            <ac:picMk id="22" creationId="{030219BA-D403-B608-8BD9-DB9F6EC6979E}"/>
-          </ac:picMkLst>
-        </pc:picChg>
-        <pc:picChg chg="add del mod modCrop">
-          <ac:chgData name="Kate Parker" userId="2917054de0bc48a0" providerId="LiveId" clId="{F1CEFB28-C78A-4591-A5A8-1345B4514FFC}" dt="2026-03-17T20:57:06.658" v="193" actId="478"/>
-          <ac:picMkLst>
-            <pc:docMk/>
-            <pc:sldMk cId="2400408542" sldId="257"/>
-            <ac:picMk id="24" creationId="{6A659762-28DD-452C-D62A-9D48BCAD6C1F}"/>
-          </ac:picMkLst>
-        </pc:picChg>
-        <pc:picChg chg="add del mod ord modCrop">
-          <ac:chgData name="Kate Parker" userId="2917054de0bc48a0" providerId="LiveId" clId="{F1CEFB28-C78A-4591-A5A8-1345B4514FFC}" dt="2026-03-17T21:04:14.992" v="235" actId="478"/>
-          <ac:picMkLst>
-            <pc:docMk/>
-            <pc:sldMk cId="2400408542" sldId="257"/>
-            <ac:picMk id="26" creationId="{E1116825-7005-01DB-2F63-33F1B3D59928}"/>
-          </ac:picMkLst>
-        </pc:picChg>
-        <pc:picChg chg="add del mod ord modCrop">
-          <ac:chgData name="Kate Parker" userId="2917054de0bc48a0" providerId="LiveId" clId="{F1CEFB28-C78A-4591-A5A8-1345B4514FFC}" dt="2026-03-17T21:04:30.582" v="238" actId="478"/>
-          <ac:picMkLst>
-            <pc:docMk/>
-            <pc:sldMk cId="2400408542" sldId="257"/>
-            <ac:picMk id="27" creationId="{C785A9E1-9818-A6CC-0D49-29AA38B96BF8}"/>
           </ac:picMkLst>
         </pc:picChg>
         <pc:picChg chg="add mod ord modCrop">
@@ -369,14 +338,6 @@
             <ac:picMk id="30" creationId="{D61D3D5E-E9D4-F265-1CC9-C6FFCB19B67B}"/>
           </ac:picMkLst>
         </pc:picChg>
-        <pc:picChg chg="add del mod modCrop">
-          <ac:chgData name="Kate Parker" userId="2917054de0bc48a0" providerId="LiveId" clId="{F1CEFB28-C78A-4591-A5A8-1345B4514FFC}" dt="2026-03-17T21:13:49.005" v="250" actId="478"/>
-          <ac:picMkLst>
-            <pc:docMk/>
-            <pc:sldMk cId="2400408542" sldId="257"/>
-            <ac:picMk id="31" creationId="{9118DCB4-7FC8-6A4A-5923-2FF95EB3E0F6}"/>
-          </ac:picMkLst>
-        </pc:picChg>
         <pc:picChg chg="add mod modCrop">
           <ac:chgData name="Kate Parker" userId="2917054de0bc48a0" providerId="LiveId" clId="{F1CEFB28-C78A-4591-A5A8-1345B4514FFC}" dt="2026-03-17T21:15:40.610" v="271" actId="1076"/>
           <ac:picMkLst>
@@ -385,13 +346,6 @@
             <ac:picMk id="33" creationId="{76EC1477-DA8E-D76E-D700-EE91AC1FEF3E}"/>
           </ac:picMkLst>
         </pc:picChg>
-      </pc:sldChg>
-      <pc:sldChg chg="add del">
-        <pc:chgData name="Kate Parker" userId="2917054de0bc48a0" providerId="LiveId" clId="{F1CEFB28-C78A-4591-A5A8-1345B4514FFC}" dt="2026-03-17T15:28:50.546" v="136" actId="2696"/>
-        <pc:sldMkLst>
-          <pc:docMk/>
-          <pc:sldMk cId="3031630760" sldId="258"/>
-        </pc:sldMkLst>
       </pc:sldChg>
     </pc:docChg>
   </pc:docChgLst>
@@ -480,7 +434,7 @@
           <a:p>
             <a:fld id="{6C97DE4B-3684-4E86-B1FF-7EA7A126B036}" type="datetimeFigureOut">
               <a:rPr lang="en-US" smtClean="0"/>
-              <a:t>3/17/2026</a:t>
+              <a:t>4/1/2026</a:t>
             </a:fld>
             <a:endParaRPr lang="en-US"/>
           </a:p>
@@ -978,7 +932,7 @@
           <a:p>
             <a:fld id="{E08A630F-8129-4D75-B864-0AD183A11C8E}" type="datetimeFigureOut">
               <a:rPr lang="en-US" smtClean="0"/>
-              <a:t>3/17/2026</a:t>
+              <a:t>4/1/2026</a:t>
             </a:fld>
             <a:endParaRPr lang="en-US"/>
           </a:p>
@@ -1176,7 +1130,7 @@
           <a:p>
             <a:fld id="{E08A630F-8129-4D75-B864-0AD183A11C8E}" type="datetimeFigureOut">
               <a:rPr lang="en-US" smtClean="0"/>
-              <a:t>3/17/2026</a:t>
+              <a:t>4/1/2026</a:t>
             </a:fld>
             <a:endParaRPr lang="en-US"/>
           </a:p>
@@ -1384,7 +1338,7 @@
           <a:p>
             <a:fld id="{E08A630F-8129-4D75-B864-0AD183A11C8E}" type="datetimeFigureOut">
               <a:rPr lang="en-US" smtClean="0"/>
-              <a:t>3/17/2026</a:t>
+              <a:t>4/1/2026</a:t>
             </a:fld>
             <a:endParaRPr lang="en-US"/>
           </a:p>
@@ -1582,7 +1536,7 @@
           <a:p>
             <a:fld id="{E08A630F-8129-4D75-B864-0AD183A11C8E}" type="datetimeFigureOut">
               <a:rPr lang="en-US" smtClean="0"/>
-              <a:t>3/17/2026</a:t>
+              <a:t>4/1/2026</a:t>
             </a:fld>
             <a:endParaRPr lang="en-US"/>
           </a:p>
@@ -1857,7 +1811,7 @@
           <a:p>
             <a:fld id="{E08A630F-8129-4D75-B864-0AD183A11C8E}" type="datetimeFigureOut">
               <a:rPr lang="en-US" smtClean="0"/>
-              <a:t>3/17/2026</a:t>
+              <a:t>4/1/2026</a:t>
             </a:fld>
             <a:endParaRPr lang="en-US"/>
           </a:p>
@@ -2122,7 +2076,7 @@
           <a:p>
             <a:fld id="{E08A630F-8129-4D75-B864-0AD183A11C8E}" type="datetimeFigureOut">
               <a:rPr lang="en-US" smtClean="0"/>
-              <a:t>3/17/2026</a:t>
+              <a:t>4/1/2026</a:t>
             </a:fld>
             <a:endParaRPr lang="en-US"/>
           </a:p>
@@ -2534,7 +2488,7 @@
           <a:p>
             <a:fld id="{E08A630F-8129-4D75-B864-0AD183A11C8E}" type="datetimeFigureOut">
               <a:rPr lang="en-US" smtClean="0"/>
-              <a:t>3/17/2026</a:t>
+              <a:t>4/1/2026</a:t>
             </a:fld>
             <a:endParaRPr lang="en-US"/>
           </a:p>
@@ -2675,7 +2629,7 @@
           <a:p>
             <a:fld id="{E08A630F-8129-4D75-B864-0AD183A11C8E}" type="datetimeFigureOut">
               <a:rPr lang="en-US" smtClean="0"/>
-              <a:t>3/17/2026</a:t>
+              <a:t>4/1/2026</a:t>
             </a:fld>
             <a:endParaRPr lang="en-US"/>
           </a:p>
@@ -2788,7 +2742,7 @@
           <a:p>
             <a:fld id="{E08A630F-8129-4D75-B864-0AD183A11C8E}" type="datetimeFigureOut">
               <a:rPr lang="en-US" smtClean="0"/>
-              <a:t>3/17/2026</a:t>
+              <a:t>4/1/2026</a:t>
             </a:fld>
             <a:endParaRPr lang="en-US"/>
           </a:p>
@@ -3099,7 +3053,7 @@
           <a:p>
             <a:fld id="{E08A630F-8129-4D75-B864-0AD183A11C8E}" type="datetimeFigureOut">
               <a:rPr lang="en-US" smtClean="0"/>
-              <a:t>3/17/2026</a:t>
+              <a:t>4/1/2026</a:t>
             </a:fld>
             <a:endParaRPr lang="en-US"/>
           </a:p>
@@ -3387,7 +3341,7 @@
           <a:p>
             <a:fld id="{E08A630F-8129-4D75-B864-0AD183A11C8E}" type="datetimeFigureOut">
               <a:rPr lang="en-US" smtClean="0"/>
-              <a:t>3/17/2026</a:t>
+              <a:t>4/1/2026</a:t>
             </a:fld>
             <a:endParaRPr lang="en-US"/>
           </a:p>
@@ -3628,7 +3582,7 @@
           <a:p>
             <a:fld id="{E08A630F-8129-4D75-B864-0AD183A11C8E}" type="datetimeFigureOut">
               <a:rPr lang="en-US" smtClean="0"/>
-              <a:t>3/17/2026</a:t>
+              <a:t>4/1/2026</a:t>
             </a:fld>
             <a:endParaRPr lang="en-US"/>
           </a:p>
@@ -4156,49 +4110,218 @@
             </a:prstGeom>
           </p:spPr>
         </p:pic>
-        <p:pic>
-          <p:nvPicPr>
-            <p:cNvPr id="9" name="Picture 8">
+      </p:grpSp>
+      <p:pic>
+        <p:nvPicPr>
+          <p:cNvPr id="30" name="Picture 29">
+            <a:extLst>
+              <a:ext uri="{FF2B5EF4-FFF2-40B4-BE49-F238E27FC236}">
+                <a16:creationId xmlns:a16="http://schemas.microsoft.com/office/drawing/2014/main" id="{D61D3D5E-E9D4-F265-1CC9-C6FFCB19B67B}"/>
+              </a:ext>
+            </a:extLst>
+          </p:cNvPr>
+          <p:cNvPicPr>
+            <a:picLocks noChangeAspect="1"/>
+          </p:cNvPicPr>
+          <p:nvPr/>
+        </p:nvPicPr>
+        <p:blipFill>
+          <a:blip r:embed="rId4">
+            <a:extLst>
+              <a:ext uri="{28A0092B-C50C-407E-A947-70E740481C1C}">
+                <a14:useLocalDpi xmlns:a14="http://schemas.microsoft.com/office/drawing/2010/main" val="0"/>
+              </a:ext>
+            </a:extLst>
+          </a:blip>
+          <a:srcRect b="53435"/>
+          <a:stretch>
+            <a:fillRect/>
+          </a:stretch>
+        </p:blipFill>
+        <p:spPr>
+          <a:xfrm>
+            <a:off x="1048741" y="182764"/>
+            <a:ext cx="6858014" cy="2128975"/>
+          </a:xfrm>
+          <a:prstGeom prst="rect">
+            <a:avLst/>
+          </a:prstGeom>
+        </p:spPr>
+      </p:pic>
+      <p:pic>
+        <p:nvPicPr>
+          <p:cNvPr id="33" name="Picture 32">
+            <a:extLst>
+              <a:ext uri="{FF2B5EF4-FFF2-40B4-BE49-F238E27FC236}">
+                <a16:creationId xmlns:a16="http://schemas.microsoft.com/office/drawing/2014/main" id="{76EC1477-DA8E-D76E-D700-EE91AC1FEF3E}"/>
+              </a:ext>
+            </a:extLst>
+          </p:cNvPr>
+          <p:cNvPicPr>
+            <a:picLocks noChangeAspect="1"/>
+          </p:cNvPicPr>
+          <p:nvPr/>
+        </p:nvPicPr>
+        <p:blipFill>
+          <a:blip r:embed="rId5">
+            <a:extLst>
+              <a:ext uri="{28A0092B-C50C-407E-A947-70E740481C1C}">
+                <a14:useLocalDpi xmlns:a14="http://schemas.microsoft.com/office/drawing/2010/main" val="0"/>
+              </a:ext>
+            </a:extLst>
+          </a:blip>
+          <a:srcRect t="55505"/>
+          <a:stretch>
+            <a:fillRect/>
+          </a:stretch>
+        </p:blipFill>
+        <p:spPr>
+          <a:xfrm>
+            <a:off x="1048741" y="2390342"/>
+            <a:ext cx="6858014" cy="2034293"/>
+          </a:xfrm>
+          <a:prstGeom prst="rect">
+            <a:avLst/>
+          </a:prstGeom>
+        </p:spPr>
+      </p:pic>
+      <p:pic>
+        <p:nvPicPr>
+          <p:cNvPr id="3" name="Picture 2">
+            <a:extLst>
+              <a:ext uri="{FF2B5EF4-FFF2-40B4-BE49-F238E27FC236}">
+                <a16:creationId xmlns:a16="http://schemas.microsoft.com/office/drawing/2014/main" id="{388684CE-ED13-C6B5-E4CC-4C08DF2BDA27}"/>
+              </a:ext>
+            </a:extLst>
+          </p:cNvPr>
+          <p:cNvPicPr>
+            <a:picLocks noChangeAspect="1"/>
+          </p:cNvPicPr>
+          <p:nvPr/>
+        </p:nvPicPr>
+        <p:blipFill>
+          <a:blip r:embed="rId6">
+            <a:extLst>
+              <a:ext uri="{28A0092B-C50C-407E-A947-70E740481C1C}">
+                <a14:useLocalDpi xmlns:a14="http://schemas.microsoft.com/office/drawing/2010/main" val="0"/>
+              </a:ext>
+            </a:extLst>
+          </a:blip>
+          <a:srcRect b="17556"/>
+          <a:stretch>
+            <a:fillRect/>
+          </a:stretch>
+        </p:blipFill>
+        <p:spPr>
+          <a:xfrm>
+            <a:off x="1046226" y="4462403"/>
+            <a:ext cx="6858014" cy="2261617"/>
+          </a:xfrm>
+          <a:prstGeom prst="rect">
+            <a:avLst/>
+          </a:prstGeom>
+        </p:spPr>
+      </p:pic>
+      <p:pic>
+        <p:nvPicPr>
+          <p:cNvPr id="28" name="Picture 27">
+            <a:extLst>
+              <a:ext uri="{FF2B5EF4-FFF2-40B4-BE49-F238E27FC236}">
+                <a16:creationId xmlns:a16="http://schemas.microsoft.com/office/drawing/2014/main" id="{10EAD6D9-70C0-7006-7336-2F87AF13BF06}"/>
+              </a:ext>
+            </a:extLst>
+          </p:cNvPr>
+          <p:cNvPicPr>
+            <a:picLocks noChangeAspect="1"/>
+          </p:cNvPicPr>
+          <p:nvPr/>
+        </p:nvPicPr>
+        <p:blipFill>
+          <a:blip r:embed="rId7">
+            <a:extLst>
+              <a:ext uri="{28A0092B-C50C-407E-A947-70E740481C1C}">
+                <a14:useLocalDpi xmlns:a14="http://schemas.microsoft.com/office/drawing/2010/main" val="0"/>
+              </a:ext>
+            </a:extLst>
+          </a:blip>
+          <a:srcRect t="50846" r="96516" b="45485"/>
+          <a:stretch>
+            <a:fillRect/>
+          </a:stretch>
+        </p:blipFill>
+        <p:spPr>
+          <a:xfrm>
+            <a:off x="1048741" y="2227880"/>
+            <a:ext cx="238968" cy="167718"/>
+          </a:xfrm>
+          <a:prstGeom prst="rect">
+            <a:avLst/>
+          </a:prstGeom>
+        </p:spPr>
+      </p:pic>
+      <p:pic>
+        <p:nvPicPr>
+          <p:cNvPr id="17" name="Picture 16">
+            <a:extLst>
+              <a:ext uri="{FF2B5EF4-FFF2-40B4-BE49-F238E27FC236}">
+                <a16:creationId xmlns:a16="http://schemas.microsoft.com/office/drawing/2014/main" id="{6EE77F7E-5E31-6005-019F-31F7DE51F658}"/>
+              </a:ext>
+            </a:extLst>
+          </p:cNvPr>
+          <p:cNvPicPr>
+            <a:picLocks noChangeAspect="1"/>
+          </p:cNvPicPr>
+          <p:nvPr/>
+        </p:nvPicPr>
+        <p:blipFill>
+          <a:blip r:embed="rId3">
+            <a:extLst>
+              <a:ext uri="{28A0092B-C50C-407E-A947-70E740481C1C}">
+                <a14:useLocalDpi xmlns:a14="http://schemas.microsoft.com/office/drawing/2010/main" val="0"/>
+              </a:ext>
+            </a:extLst>
+          </a:blip>
+          <a:srcRect l="64542" t="83218" b="-1"/>
+          <a:stretch>
+            <a:fillRect/>
+          </a:stretch>
+        </p:blipFill>
+        <p:spPr>
+          <a:xfrm>
+            <a:off x="5307495" y="6612184"/>
+            <a:ext cx="2596745" cy="491631"/>
+          </a:xfrm>
+          <a:prstGeom prst="rect">
+            <a:avLst/>
+          </a:prstGeom>
+        </p:spPr>
+      </p:pic>
+      <p:grpSp>
+        <p:nvGrpSpPr>
+          <p:cNvPr id="25" name="Group 24">
+            <a:extLst>
+              <a:ext uri="{FF2B5EF4-FFF2-40B4-BE49-F238E27FC236}">
+                <a16:creationId xmlns:a16="http://schemas.microsoft.com/office/drawing/2014/main" id="{BC03010F-A6BE-168A-A5AB-84981EA1E127}"/>
+              </a:ext>
+            </a:extLst>
+          </p:cNvPr>
+          <p:cNvGrpSpPr/>
+          <p:nvPr/>
+        </p:nvGrpSpPr>
+        <p:grpSpPr>
+          <a:xfrm>
+            <a:off x="5326545" y="6457449"/>
+            <a:ext cx="2430592" cy="338554"/>
+            <a:chOff x="8966982" y="4025842"/>
+            <a:chExt cx="2430592" cy="338554"/>
+          </a:xfrm>
+        </p:grpSpPr>
+        <p:sp>
+          <p:nvSpPr>
+            <p:cNvPr id="6" name="Left Bracket 5">
               <a:extLst>
                 <a:ext uri="{FF2B5EF4-FFF2-40B4-BE49-F238E27FC236}">
-                  <a16:creationId xmlns:a16="http://schemas.microsoft.com/office/drawing/2014/main" id="{E258AB5D-EE42-792F-EFCE-BD00171B7E55}"/>
-                </a:ext>
-              </a:extLst>
-            </p:cNvPr>
-            <p:cNvPicPr>
-              <a:picLocks noChangeAspect="1"/>
-            </p:cNvPicPr>
-            <p:nvPr/>
-          </p:nvPicPr>
-          <p:blipFill>
-            <a:blip r:embed="rId4">
-              <a:extLst>
-                <a:ext uri="{28A0092B-C50C-407E-A947-70E740481C1C}">
-                  <a14:useLocalDpi xmlns:a14="http://schemas.microsoft.com/office/drawing/2010/main" val="0"/>
-                </a:ext>
-              </a:extLst>
-            </a:blip>
-            <a:srcRect b="17556"/>
-            <a:stretch>
-              <a:fillRect/>
-            </a:stretch>
-          </p:blipFill>
-          <p:spPr>
-            <a:xfrm>
-              <a:off x="214351" y="4461800"/>
-              <a:ext cx="6858014" cy="2261618"/>
-            </a:xfrm>
-            <a:prstGeom prst="rect">
-              <a:avLst/>
-            </a:prstGeom>
-          </p:spPr>
-        </p:pic>
-        <p:sp>
-          <p:nvSpPr>
-            <p:cNvPr id="10" name="Left Bracket 9">
-              <a:extLst>
-                <a:ext uri="{FF2B5EF4-FFF2-40B4-BE49-F238E27FC236}">
-                  <a16:creationId xmlns:a16="http://schemas.microsoft.com/office/drawing/2014/main" id="{C1C5C9AE-FFD3-5641-F247-0C2DA922FD21}"/>
+                  <a16:creationId xmlns:a16="http://schemas.microsoft.com/office/drawing/2014/main" id="{3F0720A4-329A-4F01-563A-2E6C943A8338}"/>
                 </a:ext>
               </a:extLst>
             </p:cNvPr>
@@ -4207,23 +4330,27 @@
           </p:nvSpPr>
           <p:spPr>
             <a:xfrm rot="16200000">
-              <a:off x="4617580" y="6374174"/>
-              <a:ext cx="45719" cy="222154"/>
+              <a:off x="9094020" y="3937626"/>
+              <a:ext cx="45719" cy="222156"/>
             </a:xfrm>
             <a:prstGeom prst="leftBracket">
               <a:avLst/>
             </a:prstGeom>
-            <a:ln w="9525"/>
+            <a:ln>
+              <a:solidFill>
+                <a:schemeClr val="tx1"/>
+              </a:solidFill>
+            </a:ln>
           </p:spPr>
           <p:style>
             <a:lnRef idx="2">
-              <a:schemeClr val="dk1"/>
+              <a:schemeClr val="accent1"/>
             </a:lnRef>
             <a:fillRef idx="0">
-              <a:schemeClr val="dk1"/>
+              <a:schemeClr val="accent1"/>
             </a:fillRef>
             <a:effectRef idx="1">
-              <a:schemeClr val="dk1"/>
+              <a:schemeClr val="accent1"/>
             </a:effectRef>
             <a:fontRef idx="minor">
               <a:schemeClr val="tx1"/>
@@ -4240,10 +4367,10 @@
         </p:sp>
         <p:sp>
           <p:nvSpPr>
-            <p:cNvPr id="11" name="Left Bracket 10">
+            <p:cNvPr id="7" name="Left Bracket 6">
               <a:extLst>
                 <a:ext uri="{FF2B5EF4-FFF2-40B4-BE49-F238E27FC236}">
-                  <a16:creationId xmlns:a16="http://schemas.microsoft.com/office/drawing/2014/main" id="{91C46049-EA2C-2FD2-DAC6-1300000BE860}"/>
+                  <a16:creationId xmlns:a16="http://schemas.microsoft.com/office/drawing/2014/main" id="{23E00BFB-0F64-3529-98B7-ABC1177A9A6B}"/>
                 </a:ext>
               </a:extLst>
             </p:cNvPr>
@@ -4252,23 +4379,27 @@
           </p:nvSpPr>
           <p:spPr>
             <a:xfrm rot="16200000">
-              <a:off x="5636698" y="6374174"/>
-              <a:ext cx="45719" cy="222154"/>
+              <a:off x="10113138" y="3937625"/>
+              <a:ext cx="45719" cy="222156"/>
             </a:xfrm>
             <a:prstGeom prst="leftBracket">
               <a:avLst/>
             </a:prstGeom>
-            <a:ln w="9525"/>
+            <a:ln>
+              <a:solidFill>
+                <a:schemeClr val="tx1"/>
+              </a:solidFill>
+            </a:ln>
           </p:spPr>
           <p:style>
             <a:lnRef idx="2">
-              <a:schemeClr val="dk1"/>
+              <a:schemeClr val="accent1"/>
             </a:lnRef>
             <a:fillRef idx="0">
-              <a:schemeClr val="dk1"/>
+              <a:schemeClr val="accent1"/>
             </a:fillRef>
             <a:effectRef idx="1">
-              <a:schemeClr val="dk1"/>
+              <a:schemeClr val="accent1"/>
             </a:effectRef>
             <a:fontRef idx="minor">
               <a:schemeClr val="tx1"/>
@@ -4285,10 +4416,10 @@
         </p:sp>
         <p:sp>
           <p:nvSpPr>
-            <p:cNvPr id="12" name="Left Bracket 11">
+            <p:cNvPr id="21" name="Left Bracket 20">
               <a:extLst>
                 <a:ext uri="{FF2B5EF4-FFF2-40B4-BE49-F238E27FC236}">
-                  <a16:creationId xmlns:a16="http://schemas.microsoft.com/office/drawing/2014/main" id="{F5B67999-4C99-372A-90A3-FACF9EC02339}"/>
+                  <a16:creationId xmlns:a16="http://schemas.microsoft.com/office/drawing/2014/main" id="{4B89920E-670D-38B5-4091-CBA4DD6754E5}"/>
                 </a:ext>
               </a:extLst>
             </p:cNvPr>
@@ -4297,23 +4428,27 @@
           </p:nvSpPr>
           <p:spPr>
             <a:xfrm rot="16200000">
-              <a:off x="6748379" y="6374174"/>
-              <a:ext cx="45719" cy="222154"/>
+              <a:off x="11224818" y="3937624"/>
+              <a:ext cx="45719" cy="222156"/>
             </a:xfrm>
             <a:prstGeom prst="leftBracket">
               <a:avLst/>
             </a:prstGeom>
-            <a:ln w="9525"/>
+            <a:ln>
+              <a:solidFill>
+                <a:schemeClr val="tx1"/>
+              </a:solidFill>
+            </a:ln>
           </p:spPr>
           <p:style>
             <a:lnRef idx="2">
-              <a:schemeClr val="dk1"/>
+              <a:schemeClr val="accent1"/>
             </a:lnRef>
             <a:fillRef idx="0">
-              <a:schemeClr val="dk1"/>
+              <a:schemeClr val="accent1"/>
             </a:fillRef>
             <a:effectRef idx="1">
-              <a:schemeClr val="dk1"/>
+              <a:schemeClr val="accent1"/>
             </a:effectRef>
             <a:fontRef idx="minor">
               <a:schemeClr val="tx1"/>
@@ -4330,10 +4465,10 @@
         </p:sp>
         <p:sp>
           <p:nvSpPr>
-            <p:cNvPr id="13" name="TextBox 12">
+            <p:cNvPr id="22" name="TextBox 21">
               <a:extLst>
                 <a:ext uri="{FF2B5EF4-FFF2-40B4-BE49-F238E27FC236}">
-                  <a16:creationId xmlns:a16="http://schemas.microsoft.com/office/drawing/2014/main" id="{F375EC5E-1547-F215-B182-C1ED9D355CF9}"/>
+                  <a16:creationId xmlns:a16="http://schemas.microsoft.com/office/drawing/2014/main" id="{795E2ACE-9E2D-619C-0839-4E9BDE059903}"/>
                 </a:ext>
               </a:extLst>
             </p:cNvPr>
@@ -4342,7 +4477,7 @@
           </p:nvSpPr>
           <p:spPr>
             <a:xfrm>
-              <a:off x="4490542" y="6447003"/>
+              <a:off x="8966982" y="4025842"/>
               <a:ext cx="299794" cy="338554"/>
             </a:xfrm>
             <a:prstGeom prst="rect">
@@ -4370,10 +4505,10 @@
         </p:sp>
         <p:sp>
           <p:nvSpPr>
-            <p:cNvPr id="14" name="TextBox 13">
+            <p:cNvPr id="23" name="TextBox 22">
               <a:extLst>
                 <a:ext uri="{FF2B5EF4-FFF2-40B4-BE49-F238E27FC236}">
-                  <a16:creationId xmlns:a16="http://schemas.microsoft.com/office/drawing/2014/main" id="{3EE36DEA-E1AE-C0FA-BD06-CD9BAC32E4FD}"/>
+                  <a16:creationId xmlns:a16="http://schemas.microsoft.com/office/drawing/2014/main" id="{48A7D015-D787-FDB1-C2A3-BBA67E63CA7F}"/>
                 </a:ext>
               </a:extLst>
             </p:cNvPr>
@@ -4382,7 +4517,7 @@
           </p:nvSpPr>
           <p:spPr>
             <a:xfrm>
-              <a:off x="5509660" y="6447002"/>
+              <a:off x="9986100" y="4025842"/>
               <a:ext cx="299794" cy="338554"/>
             </a:xfrm>
             <a:prstGeom prst="rect">
@@ -4410,10 +4545,10 @@
         </p:sp>
         <p:sp>
           <p:nvSpPr>
-            <p:cNvPr id="15" name="TextBox 14">
+            <p:cNvPr id="24" name="TextBox 23">
               <a:extLst>
                 <a:ext uri="{FF2B5EF4-FFF2-40B4-BE49-F238E27FC236}">
-                  <a16:creationId xmlns:a16="http://schemas.microsoft.com/office/drawing/2014/main" id="{E397CA28-9B72-495E-F230-AC6628AB4C86}"/>
+                  <a16:creationId xmlns:a16="http://schemas.microsoft.com/office/drawing/2014/main" id="{84FA8B9F-C33B-0C96-F932-4BD1EF6C70B0}"/>
                 </a:ext>
               </a:extLst>
             </p:cNvPr>
@@ -4422,7 +4557,7 @@
           </p:nvSpPr>
           <p:spPr>
             <a:xfrm>
-              <a:off x="6621341" y="6447001"/>
+              <a:off x="11097780" y="4025842"/>
               <a:ext cx="299794" cy="338554"/>
             </a:xfrm>
             <a:prstGeom prst="rect">
@@ -4449,301 +4584,6 @@
           </p:txBody>
         </p:sp>
       </p:grpSp>
-      <p:pic>
-        <p:nvPicPr>
-          <p:cNvPr id="17" name="Picture 16">
-            <a:extLst>
-              <a:ext uri="{FF2B5EF4-FFF2-40B4-BE49-F238E27FC236}">
-                <a16:creationId xmlns:a16="http://schemas.microsoft.com/office/drawing/2014/main" id="{6EE77F7E-5E31-6005-019F-31F7DE51F658}"/>
-              </a:ext>
-            </a:extLst>
-          </p:cNvPr>
-          <p:cNvPicPr>
-            <a:picLocks noChangeAspect="1"/>
-          </p:cNvPicPr>
-          <p:nvPr/>
-        </p:nvPicPr>
-        <p:blipFill>
-          <a:blip r:embed="rId3">
-            <a:extLst>
-              <a:ext uri="{28A0092B-C50C-407E-A947-70E740481C1C}">
-                <a14:useLocalDpi xmlns:a14="http://schemas.microsoft.com/office/drawing/2010/main" val="0"/>
-              </a:ext>
-            </a:extLst>
-          </a:blip>
-          <a:srcRect l="64542" t="83218" b="-1"/>
-          <a:stretch>
-            <a:fillRect/>
-          </a:stretch>
-        </p:blipFill>
-        <p:spPr>
-          <a:xfrm>
-            <a:off x="5307495" y="6612184"/>
-            <a:ext cx="2596745" cy="491631"/>
-          </a:xfrm>
-          <a:prstGeom prst="rect">
-            <a:avLst/>
-          </a:prstGeom>
-        </p:spPr>
-      </p:pic>
-      <p:sp>
-        <p:nvSpPr>
-          <p:cNvPr id="18" name="Left Bracket 17">
-            <a:extLst>
-              <a:ext uri="{FF2B5EF4-FFF2-40B4-BE49-F238E27FC236}">
-                <a16:creationId xmlns:a16="http://schemas.microsoft.com/office/drawing/2014/main" id="{E3036C35-3A7F-F8C4-4BFC-03661151B1DC}"/>
-              </a:ext>
-            </a:extLst>
-          </p:cNvPr>
-          <p:cNvSpPr/>
-          <p:nvPr/>
-        </p:nvSpPr>
-        <p:spPr>
-          <a:xfrm rot="16200000">
-            <a:off x="5451971" y="6370991"/>
-            <a:ext cx="45719" cy="222156"/>
-          </a:xfrm>
-          <a:prstGeom prst="leftBracket">
-            <a:avLst/>
-          </a:prstGeom>
-          <a:ln>
-            <a:solidFill>
-              <a:schemeClr val="tx1"/>
-            </a:solidFill>
-          </a:ln>
-        </p:spPr>
-        <p:style>
-          <a:lnRef idx="2">
-            <a:schemeClr val="accent1"/>
-          </a:lnRef>
-          <a:fillRef idx="0">
-            <a:schemeClr val="accent1"/>
-          </a:fillRef>
-          <a:effectRef idx="1">
-            <a:schemeClr val="accent1"/>
-          </a:effectRef>
-          <a:fontRef idx="minor">
-            <a:schemeClr val="tx1"/>
-          </a:fontRef>
-        </p:style>
-        <p:txBody>
-          <a:bodyPr rtlCol="0" anchor="ctr"/>
-          <a:lstStyle/>
-          <a:p>
-            <a:pPr algn="ctr"/>
-            <a:endParaRPr lang="en-US"/>
-          </a:p>
-        </p:txBody>
-      </p:sp>
-      <p:sp>
-        <p:nvSpPr>
-          <p:cNvPr id="19" name="Left Bracket 18">
-            <a:extLst>
-              <a:ext uri="{FF2B5EF4-FFF2-40B4-BE49-F238E27FC236}">
-                <a16:creationId xmlns:a16="http://schemas.microsoft.com/office/drawing/2014/main" id="{012F7560-0511-6508-2DB9-BFA644B5B1A3}"/>
-              </a:ext>
-            </a:extLst>
-          </p:cNvPr>
-          <p:cNvSpPr/>
-          <p:nvPr/>
-        </p:nvSpPr>
-        <p:spPr>
-          <a:xfrm rot="16200000">
-            <a:off x="6471089" y="6370990"/>
-            <a:ext cx="45719" cy="222156"/>
-          </a:xfrm>
-          <a:prstGeom prst="leftBracket">
-            <a:avLst/>
-          </a:prstGeom>
-          <a:ln>
-            <a:solidFill>
-              <a:schemeClr val="tx1"/>
-            </a:solidFill>
-          </a:ln>
-        </p:spPr>
-        <p:style>
-          <a:lnRef idx="2">
-            <a:schemeClr val="accent1"/>
-          </a:lnRef>
-          <a:fillRef idx="0">
-            <a:schemeClr val="accent1"/>
-          </a:fillRef>
-          <a:effectRef idx="1">
-            <a:schemeClr val="accent1"/>
-          </a:effectRef>
-          <a:fontRef idx="minor">
-            <a:schemeClr val="tx1"/>
-          </a:fontRef>
-        </p:style>
-        <p:txBody>
-          <a:bodyPr rtlCol="0" anchor="ctr"/>
-          <a:lstStyle/>
-          <a:p>
-            <a:pPr algn="ctr"/>
-            <a:endParaRPr lang="en-US"/>
-          </a:p>
-        </p:txBody>
-      </p:sp>
-      <p:sp>
-        <p:nvSpPr>
-          <p:cNvPr id="20" name="Left Bracket 19">
-            <a:extLst>
-              <a:ext uri="{FF2B5EF4-FFF2-40B4-BE49-F238E27FC236}">
-                <a16:creationId xmlns:a16="http://schemas.microsoft.com/office/drawing/2014/main" id="{D6E61D77-4DE1-0A12-83FC-FA9A540EC19D}"/>
-              </a:ext>
-            </a:extLst>
-          </p:cNvPr>
-          <p:cNvSpPr/>
-          <p:nvPr/>
-        </p:nvSpPr>
-        <p:spPr>
-          <a:xfrm rot="16200000">
-            <a:off x="7582769" y="6370989"/>
-            <a:ext cx="45719" cy="222156"/>
-          </a:xfrm>
-          <a:prstGeom prst="leftBracket">
-            <a:avLst/>
-          </a:prstGeom>
-          <a:ln>
-            <a:solidFill>
-              <a:schemeClr val="tx1"/>
-            </a:solidFill>
-          </a:ln>
-        </p:spPr>
-        <p:style>
-          <a:lnRef idx="2">
-            <a:schemeClr val="accent1"/>
-          </a:lnRef>
-          <a:fillRef idx="0">
-            <a:schemeClr val="accent1"/>
-          </a:fillRef>
-          <a:effectRef idx="1">
-            <a:schemeClr val="accent1"/>
-          </a:effectRef>
-          <a:fontRef idx="minor">
-            <a:schemeClr val="tx1"/>
-          </a:fontRef>
-        </p:style>
-        <p:txBody>
-          <a:bodyPr rtlCol="0" anchor="ctr"/>
-          <a:lstStyle/>
-          <a:p>
-            <a:pPr algn="ctr"/>
-            <a:endParaRPr lang="en-US"/>
-          </a:p>
-        </p:txBody>
-      </p:sp>
-      <p:pic>
-        <p:nvPicPr>
-          <p:cNvPr id="30" name="Picture 29">
-            <a:extLst>
-              <a:ext uri="{FF2B5EF4-FFF2-40B4-BE49-F238E27FC236}">
-                <a16:creationId xmlns:a16="http://schemas.microsoft.com/office/drawing/2014/main" id="{D61D3D5E-E9D4-F265-1CC9-C6FFCB19B67B}"/>
-              </a:ext>
-            </a:extLst>
-          </p:cNvPr>
-          <p:cNvPicPr>
-            <a:picLocks noChangeAspect="1"/>
-          </p:cNvPicPr>
-          <p:nvPr/>
-        </p:nvPicPr>
-        <p:blipFill>
-          <a:blip r:embed="rId5">
-            <a:extLst>
-              <a:ext uri="{28A0092B-C50C-407E-A947-70E740481C1C}">
-                <a14:useLocalDpi xmlns:a14="http://schemas.microsoft.com/office/drawing/2010/main" val="0"/>
-              </a:ext>
-            </a:extLst>
-          </a:blip>
-          <a:srcRect b="53435"/>
-          <a:stretch>
-            <a:fillRect/>
-          </a:stretch>
-        </p:blipFill>
-        <p:spPr>
-          <a:xfrm>
-            <a:off x="1048741" y="182764"/>
-            <a:ext cx="6858014" cy="2128975"/>
-          </a:xfrm>
-          <a:prstGeom prst="rect">
-            <a:avLst/>
-          </a:prstGeom>
-        </p:spPr>
-      </p:pic>
-      <p:pic>
-        <p:nvPicPr>
-          <p:cNvPr id="33" name="Picture 32">
-            <a:extLst>
-              <a:ext uri="{FF2B5EF4-FFF2-40B4-BE49-F238E27FC236}">
-                <a16:creationId xmlns:a16="http://schemas.microsoft.com/office/drawing/2014/main" id="{76EC1477-DA8E-D76E-D700-EE91AC1FEF3E}"/>
-              </a:ext>
-            </a:extLst>
-          </p:cNvPr>
-          <p:cNvPicPr>
-            <a:picLocks noChangeAspect="1"/>
-          </p:cNvPicPr>
-          <p:nvPr/>
-        </p:nvPicPr>
-        <p:blipFill>
-          <a:blip r:embed="rId6">
-            <a:extLst>
-              <a:ext uri="{28A0092B-C50C-407E-A947-70E740481C1C}">
-                <a14:useLocalDpi xmlns:a14="http://schemas.microsoft.com/office/drawing/2010/main" val="0"/>
-              </a:ext>
-            </a:extLst>
-          </a:blip>
-          <a:srcRect t="55505"/>
-          <a:stretch>
-            <a:fillRect/>
-          </a:stretch>
-        </p:blipFill>
-        <p:spPr>
-          <a:xfrm>
-            <a:off x="1048741" y="2390342"/>
-            <a:ext cx="6858014" cy="2034293"/>
-          </a:xfrm>
-          <a:prstGeom prst="rect">
-            <a:avLst/>
-          </a:prstGeom>
-        </p:spPr>
-      </p:pic>
-      <p:pic>
-        <p:nvPicPr>
-          <p:cNvPr id="28" name="Picture 27">
-            <a:extLst>
-              <a:ext uri="{FF2B5EF4-FFF2-40B4-BE49-F238E27FC236}">
-                <a16:creationId xmlns:a16="http://schemas.microsoft.com/office/drawing/2014/main" id="{10EAD6D9-70C0-7006-7336-2F87AF13BF06}"/>
-              </a:ext>
-            </a:extLst>
-          </p:cNvPr>
-          <p:cNvPicPr>
-            <a:picLocks noChangeAspect="1"/>
-          </p:cNvPicPr>
-          <p:nvPr/>
-        </p:nvPicPr>
-        <p:blipFill>
-          <a:blip r:embed="rId7">
-            <a:extLst>
-              <a:ext uri="{28A0092B-C50C-407E-A947-70E740481C1C}">
-                <a14:useLocalDpi xmlns:a14="http://schemas.microsoft.com/office/drawing/2010/main" val="0"/>
-              </a:ext>
-            </a:extLst>
-          </a:blip>
-          <a:srcRect t="50846" r="96516" b="45485"/>
-          <a:stretch>
-            <a:fillRect/>
-          </a:stretch>
-        </p:blipFill>
-        <p:spPr>
-          <a:xfrm>
-            <a:off x="1048741" y="2227880"/>
-            <a:ext cx="238968" cy="167718"/>
-          </a:xfrm>
-          <a:prstGeom prst="rect">
-            <a:avLst/>
-          </a:prstGeom>
-        </p:spPr>
-      </p:pic>
     </p:spTree>
     <p:extLst>
       <p:ext uri="{BB962C8B-B14F-4D97-AF65-F5344CB8AC3E}">
